--- a/documents/요청/[WeValue]Mera tube vs Tracoe.pptx
+++ b/documents/요청/[WeValue]Mera tube vs Tracoe.pptx
@@ -2608,7 +2608,7 @@
           <p:nvPr>
             <p:extLst>
               <p:ext uri="{D42A27DB-BD31-4B8C-83A1-F6EECF244321}">
-                <p14:modId xmlns:p14="http://schemas.microsoft.com/office/powerpoint/2010/main" val="1514266408"/>
+                <p14:modId xmlns:p14="http://schemas.microsoft.com/office/powerpoint/2010/main" val="2138149428"/>
               </p:ext>
             </p:extLst>
           </p:nvPr>
@@ -3212,12 +3212,6 @@
                     <a:p>
                       <a:pPr fontAlgn="base" latinLnBrk="1"/>
                       <a:r>
-                        <a:rPr lang="en-US" altLang="ko-KR" sz="1200" kern="1200" dirty="0">
-                          <a:effectLst/>
-                        </a:rPr>
-                        <a:t>•</a:t>
-                      </a:r>
-                      <a:r>
                         <a:rPr lang="ko-KR" altLang="en-US" sz="1200" kern="1200" dirty="0">
                           <a:effectLst/>
                         </a:rPr>
@@ -3254,7 +3248,7 @@
                         <a:rPr lang="en-US" altLang="ko-KR" sz="1200" kern="1200" dirty="0">
                           <a:effectLst/>
                         </a:rPr>
-                        <a:t>• Ventilator </a:t>
+                        <a:t>Ventilator </a:t>
                       </a:r>
                       <a:r>
                         <a:rPr lang="ko-KR" altLang="en-US" sz="1200" kern="1200" dirty="0">
